--- a/reports/tamil-nadu-sir-2026-deck.pptx
+++ b/reports/tamil-nadu-sir-2026-deck.pptx
@@ -3411,7 +3411,7 @@
           <a:p>
             <a:r>
               <a:rPr lang="en-US" dirty="0"/>
-              <a:t>Every figure in this deck is computed from the Chief Electoral Officer's tables and the 2026 results, the same data the website and the full report use. No name or EPIC number is published.</a:t>
+              <a:t>The Special Intensive Revision (SIR) is the Election Commission's house-to-house recheck of the electoral roll, the list of people entitled to vote. The draft roll is the roll published after that check, and the final roll the one published once claims and objections are decided. Every figure in this deck is computed from the Chief Electoral Officer's tables and the 2026 results, the same data the website and the full report use. No name or EPIC number is published.</a:t>
             </a:r>
             <a:endParaRPr lang="en-US" dirty="0"/>
           </a:p>
@@ -4203,7 +4203,7 @@
           <a:p>
             <a:r>
               <a:rPr lang="en-US" dirty="0"/>
-              <a:t/>
+              <a:t>Per 100 electors is the number removed for every 100 people on the roll before the revision, which lets places of different size be compared. The winning margin is the winner's votes less the runner-up's.</a:t>
             </a:r>
             <a:endParaRPr lang="en-US" dirty="0"/>
           </a:p>
@@ -4467,7 +4467,7 @@
           <a:p>
             <a:r>
               <a:rPr lang="en-US" dirty="0"/>
-              <a:t/>
+              <a:t>A rank correlation runs from -1 to 1 and measures how far two orderings agree.</a:t>
             </a:r>
             <a:endParaRPr lang="en-US" dirty="0"/>
           </a:p>
@@ -21096,7 +21096,7 @@
                 <a:ea typeface="Calibri" pitchFamily="34" charset="-122"/>
                 <a:cs typeface="Calibri" pitchFamily="34" charset="-120"/>
               </a:rPr>
-              <a:t>In 211 of the 234 constituencies, more names were left off than the 2026 winning margin, large enough to decide the seat. Counting only the living removed at each seat's turnout, 169.</a:t>
+              <a:t>In 211 of the 234 constituencies, more names were left off than the 2026 winning margin, large enough to decide the seat. Counting only the removed not entered as dead, at each seat's turnout, the number is 169.</a:t>
             </a:r>
             <a:endParaRPr lang="en-US" sz="1600" dirty="0"/>
           </a:p>
@@ -25136,7 +25136,7 @@
       </p:graphicFrame>
       <p:sp>
         <p:nvSpPr>
-          <p:cNvPr id="48" name="Text 45"/>
+          <p:cNvPr id="49" name="Text 45"/>
           <p:cNvSpPr txBox="1"/>
           <p:nvPr/>
         </p:nvSpPr>

--- a/reports/tamil-nadu-sir-2026-deck.pptx
+++ b/reports/tamil-nadu-sir-2026-deck.pptx
@@ -728,115 +728,115 @@
                 <c:formatCode>General</c:formatCode>
                 <c:ptCount val="38"/>
                 <c:pt idx="0">
-                  <c:v>35.58</c:v>
+                  <c:v>35.5837</c:v>
                 </c:pt>
                 <c:pt idx="1">
-                  <c:v>25.18</c:v>
+                  <c:v>25.1805</c:v>
                 </c:pt>
                 <c:pt idx="2">
-                  <c:v>23.06</c:v>
+                  <c:v>23.0594</c:v>
                 </c:pt>
                 <c:pt idx="3">
-                  <c:v>20.17</c:v>
+                  <c:v>20.1721</c:v>
                 </c:pt>
                 <c:pt idx="4">
-                  <c:v>19.57</c:v>
+                  <c:v>19.5743</c:v>
                 </c:pt>
                 <c:pt idx="5">
-                  <c:v>17.3</c:v>
+                  <c:v>17.3014</c:v>
                 </c:pt>
                 <c:pt idx="6">
-                  <c:v>16.8</c:v>
+                  <c:v>16.7952</c:v>
                 </c:pt>
                 <c:pt idx="7">
-                  <c:v>16.5</c:v>
+                  <c:v>16.5019</c:v>
                 </c:pt>
                 <c:pt idx="8">
-                  <c:v>16.29</c:v>
+                  <c:v>16.2944</c:v>
                 </c:pt>
                 <c:pt idx="9">
-                  <c:v>15.16</c:v>
+                  <c:v>15.1557</c:v>
                 </c:pt>
                 <c:pt idx="10">
-                  <c:v>14.01</c:v>
+                  <c:v>14.0056</c:v>
                 </c:pt>
                 <c:pt idx="11">
-                  <c:v>13.88</c:v>
+                  <c:v>13.8827</c:v>
                 </c:pt>
                 <c:pt idx="12">
-                  <c:v>13.72</c:v>
+                  <c:v>13.7238</c:v>
                 </c:pt>
                 <c:pt idx="13">
-                  <c:v>13.21</c:v>
+                  <c:v>13.2073</c:v>
                 </c:pt>
                 <c:pt idx="14">
-                  <c:v>12.26</c:v>
+                  <c:v>12.2631</c:v>
                 </c:pt>
                 <c:pt idx="15">
-                  <c:v>12.04</c:v>
+                  <c:v>12.0382</c:v>
                 </c:pt>
                 <c:pt idx="16">
-                  <c:v>11.96</c:v>
+                  <c:v>11.9592</c:v>
                 </c:pt>
                 <c:pt idx="17">
-                  <c:v>11.88</c:v>
+                  <c:v>11.8838</c:v>
                 </c:pt>
                 <c:pt idx="18">
-                  <c:v>11.68</c:v>
+                  <c:v>11.6808</c:v>
                 </c:pt>
                 <c:pt idx="19">
-                  <c:v>11.68</c:v>
+                  <c:v>11.6794</c:v>
                 </c:pt>
                 <c:pt idx="20">
-                  <c:v>11.25</c:v>
+                  <c:v>11.2519</c:v>
                 </c:pt>
                 <c:pt idx="21">
-                  <c:v>11.12</c:v>
+                  <c:v>11.1244</c:v>
                 </c:pt>
                 <c:pt idx="22">
-                  <c:v>11.05</c:v>
+                  <c:v>11.0467</c:v>
                 </c:pt>
                 <c:pt idx="23">
-                  <c:v>10.9</c:v>
+                  <c:v>10.9028</c:v>
                 </c:pt>
                 <c:pt idx="24">
-                  <c:v>10.59</c:v>
+                  <c:v>10.5856</c:v>
                 </c:pt>
                 <c:pt idx="25">
-                  <c:v>10.39</c:v>
+                  <c:v>10.386</c:v>
                 </c:pt>
                 <c:pt idx="26">
-                  <c:v>10.1</c:v>
+                  <c:v>10.0995</c:v>
                 </c:pt>
                 <c:pt idx="27">
-                  <c:v>10.01</c:v>
+                  <c:v>10.0126</c:v>
                 </c:pt>
                 <c:pt idx="28">
-                  <c:v>9.84</c:v>
+                  <c:v>9.8402</c:v>
                 </c:pt>
                 <c:pt idx="29">
                   <c:v>9.71</c:v>
                 </c:pt>
                 <c:pt idx="30">
-                  <c:v>9.63</c:v>
+                  <c:v>9.6287</c:v>
                 </c:pt>
                 <c:pt idx="31">
-                  <c:v>9.62</c:v>
+                  <c:v>9.6207</c:v>
                 </c:pt>
                 <c:pt idx="32">
-                  <c:v>9.52</c:v>
+                  <c:v>9.5204</c:v>
                 </c:pt>
                 <c:pt idx="33">
-                  <c:v>8.87</c:v>
+                  <c:v>8.8706</c:v>
                 </c:pt>
                 <c:pt idx="34">
-                  <c:v>8.39</c:v>
+                  <c:v>8.391</c:v>
                 </c:pt>
                 <c:pt idx="35">
-                  <c:v>7.27</c:v>
+                  <c:v>7.2659</c:v>
                 </c:pt>
                 <c:pt idx="36">
-                  <c:v>6.34</c:v>
+                  <c:v>6.3414</c:v>
                 </c:pt>
                 <c:pt idx="37">
                   <c:v>4.59</c:v>
@@ -2342,40 +2342,40 @@
                 <c:formatCode>General</c:formatCode>
                 <c:ptCount val="12"/>
                 <c:pt idx="0">
-                  <c:v>35.58</c:v>
+                  <c:v>35.5837</c:v>
                 </c:pt>
                 <c:pt idx="1">
-                  <c:v>25.18</c:v>
+                  <c:v>25.1805</c:v>
                 </c:pt>
                 <c:pt idx="2">
-                  <c:v>23.06</c:v>
+                  <c:v>23.0594</c:v>
                 </c:pt>
                 <c:pt idx="3">
-                  <c:v>20.17</c:v>
+                  <c:v>20.1721</c:v>
                 </c:pt>
                 <c:pt idx="4">
-                  <c:v>19.57</c:v>
+                  <c:v>19.5743</c:v>
                 </c:pt>
                 <c:pt idx="5">
-                  <c:v>17.3</c:v>
+                  <c:v>17.3014</c:v>
                 </c:pt>
                 <c:pt idx="6">
-                  <c:v>16.8</c:v>
+                  <c:v>16.7952</c:v>
                 </c:pt>
                 <c:pt idx="7">
-                  <c:v>16.5</c:v>
+                  <c:v>16.5019</c:v>
                 </c:pt>
                 <c:pt idx="8">
-                  <c:v>16.29</c:v>
+                  <c:v>16.2944</c:v>
                 </c:pt>
                 <c:pt idx="9">
-                  <c:v>15.16</c:v>
+                  <c:v>15.1557</c:v>
                 </c:pt>
                 <c:pt idx="10">
-                  <c:v>14.01</c:v>
+                  <c:v>14.0056</c:v>
                 </c:pt>
                 <c:pt idx="11">
-                  <c:v>13.88</c:v>
+                  <c:v>13.8827</c:v>
                 </c:pt>
               </c:numCache>
             </c:numRef>
@@ -2479,40 +2479,40 @@
                 <c:formatCode>General</c:formatCode>
                 <c:ptCount val="12"/>
                 <c:pt idx="0">
-                  <c:v>29.31</c:v>
+                  <c:v>29.3096</c:v>
                 </c:pt>
                 <c:pt idx="1">
-                  <c:v>18.92</c:v>
+                  <c:v>18.9185</c:v>
                 </c:pt>
                 <c:pt idx="2">
-                  <c:v>20.03</c:v>
+                  <c:v>20.027</c:v>
                 </c:pt>
                 <c:pt idx="3">
-                  <c:v>16.38</c:v>
+                  <c:v>16.383</c:v>
                 </c:pt>
                 <c:pt idx="4">
-                  <c:v>14.92</c:v>
+                  <c:v>14.9161</c:v>
                 </c:pt>
                 <c:pt idx="5">
-                  <c:v>11.86</c:v>
+                  <c:v>11.8589</c:v>
                 </c:pt>
                 <c:pt idx="6">
-                  <c:v>13.56</c:v>
+                  <c:v>13.5632</c:v>
                 </c:pt>
                 <c:pt idx="7">
-                  <c:v>13</c:v>
+                  <c:v>13.0038</c:v>
                 </c:pt>
                 <c:pt idx="8">
-                  <c:v>12.87</c:v>
+                  <c:v>12.8664</c:v>
                 </c:pt>
                 <c:pt idx="9">
-                  <c:v>11.64</c:v>
+                  <c:v>11.6377</c:v>
                 </c:pt>
                 <c:pt idx="10">
-                  <c:v>10.24</c:v>
+                  <c:v>10.2435</c:v>
                 </c:pt>
                 <c:pt idx="11">
-                  <c:v>9.99</c:v>
+                  <c:v>9.9859</c:v>
                 </c:pt>
               </c:numCache>
             </c:numRef>
@@ -21140,7 +21140,7 @@
                 <a:ea typeface="Calibri" pitchFamily="34" charset="-122"/>
                 <a:cs typeface="Calibri" pitchFamily="34" charset="-120"/>
               </a:rPr>
-              <a:t>Chennai lost 35.6 of every 100 electors. It holds 6.3% of the roll and 14.6% of the names removed.</a:t>
+              <a:t>Chennai lost 35.6 of every 100 electors. It holds 6.2% of the roll and 14.6% of the names removed.</a:t>
             </a:r>
             <a:endParaRPr lang="en-US" sz="1600" dirty="0"/>
           </a:p>
@@ -26340,7 +26340,7 @@
                 <a:ea typeface="Calibri" pitchFamily="34" charset="-122"/>
                 <a:cs typeface="Calibri" pitchFamily="34" charset="-120"/>
               </a:rPr>
-              <a:t>Chennai holds 6.3% of the roll and 14.6% of the names removed, 14,25,018 in all.</a:t>
+              <a:t>Chennai holds 6.2% of the roll and 14.6% of the names removed, 14,25,018 in all.</a:t>
             </a:r>
             <a:endParaRPr lang="en-US" sz="1400" dirty="0"/>
           </a:p>

--- a/reports/tamil-nadu-sir-2026-deck.pptx
+++ b/reports/tamil-nadu-sir-2026-deck.pptx
@@ -7702,7 +7702,7 @@
                 <a:ea typeface="Cambria" pitchFamily="34" charset="-122"/>
                 <a:cs typeface="Cambria" pitchFamily="34" charset="-120"/>
               </a:rPr>
-              <a:t>Counting only the living removed at each seat's turnout, they outnumber the margin in 169 seats</a:t>
+              <a:t>Counting only the living removed at each seat's turnout, they outnumber the margin in 168 seats</a:t>
             </a:r>
             <a:endParaRPr lang="en-US" sz="2700" dirty="0"/>
           </a:p>
@@ -8890,7 +8890,7 @@
                 <a:ea typeface="Cambria" pitchFamily="34" charset="-122"/>
                 <a:cs typeface="Cambria" pitchFamily="34" charset="-120"/>
               </a:rPr>
-              <a:t>169 of 234</a:t>
+              <a:t>168 of 234</a:t>
             </a:r>
             <a:endParaRPr lang="en-US" sz="2800" dirty="0"/>
           </a:p>
@@ -8975,7 +8975,7 @@
                 <a:ea typeface="Calibri" pitchFamily="34" charset="-122"/>
                 <a:cs typeface="Calibri" pitchFamily="34" charset="-120"/>
               </a:rPr>
-              <a:t>In the other 65 seats, the runner-up could not have won even if every living person removed had voted for the runner-up at the seat's turnout. Even the narrowest count assumes all of them would have, which nobody can know.</a:t>
+              <a:t>In the other 66 seats, the runner-up could not have won even if every living person removed had voted for the runner-up at the seat's turnout. Even the narrowest count assumes all of them would have, which nobody can know.</a:t>
             </a:r>
             <a:endParaRPr lang="en-US" sz="1600" dirty="0"/>
           </a:p>
@@ -21096,7 +21096,7 @@
                 <a:ea typeface="Calibri" pitchFamily="34" charset="-122"/>
                 <a:cs typeface="Calibri" pitchFamily="34" charset="-120"/>
               </a:rPr>
-              <a:t>In 211 of the 234 constituencies, more names were left off than the 2026 winning margin, large enough to decide the seat. Counting only the removed not entered as dead, at each seat's turnout, the number is 169.</a:t>
+              <a:t>In 211 of the 234 constituencies, more names were left off than the 2026 winning margin, large enough to decide the seat. Counting only the removed not entered as dead, at each seat's turnout, the number is 168.</a:t>
             </a:r>
             <a:endParaRPr lang="en-US" sz="1600" dirty="0"/>
           </a:p>

--- a/reports/tamil-nadu-sir-2026-deck.pptx
+++ b/reports/tamil-nadu-sir-2026-deck.pptx
@@ -5672,7 +5672,7 @@
                 <a:ea typeface="Calibri" pitchFamily="34" charset="-122"/>
                 <a:cs typeface="Calibri" pitchFamily="34" charset="-120"/>
               </a:rPr>
-              <a:t>PinPoint Ventures</a:t>
+              <a:t>ImpactMojo</a:t>
             </a:r>
             <a:endParaRPr lang="en-US" sz="1300" dirty="0"/>
           </a:p>
@@ -6655,7 +6655,7 @@
                 <a:ea typeface="Calibri" pitchFamily="34" charset="-122"/>
                 <a:cs typeface="Calibri" pitchFamily="34" charset="-120"/>
               </a:rPr>
-              <a:t>Tamil Nadu SIR 2026 · PinPoint Ventures · totals only, never names or EPIC numbers</a:t>
+              <a:t>Tamil Nadu SIR 2026 · ImpactMojo · totals only, never names or EPIC numbers</a:t>
             </a:r>
             <a:endParaRPr lang="en-US" sz="900" dirty="0"/>
           </a:p>
@@ -7780,7 +7780,7 @@
                 <a:ea typeface="Calibri" pitchFamily="34" charset="-122"/>
                 <a:cs typeface="Calibri" pitchFamily="34" charset="-120"/>
               </a:rPr>
-              <a:t>Tamil Nadu SIR 2026 · PinPoint Ventures · totals only, never names or EPIC numbers</a:t>
+              <a:t>Tamil Nadu SIR 2026 · ImpactMojo · totals only, never names or EPIC numbers</a:t>
             </a:r>
             <a:endParaRPr lang="en-US" sz="900" dirty="0"/>
           </a:p>
@@ -9158,7 +9158,7 @@
                 <a:ea typeface="Calibri" pitchFamily="34" charset="-122"/>
                 <a:cs typeface="Calibri" pitchFamily="34" charset="-120"/>
               </a:rPr>
-              <a:t>Tamil Nadu SIR 2026 · PinPoint Ventures · totals only, never names or EPIC numbers</a:t>
+              <a:t>Tamil Nadu SIR 2026 · ImpactMojo · totals only, never names or EPIC numbers</a:t>
             </a:r>
             <a:endParaRPr lang="en-US" sz="900" dirty="0"/>
           </a:p>
@@ -14707,7 +14707,7 @@
                 <a:ea typeface="Calibri" pitchFamily="34" charset="-122"/>
                 <a:cs typeface="Calibri" pitchFamily="34" charset="-120"/>
               </a:rPr>
-              <a:t>Tamil Nadu SIR 2026 · PinPoint Ventures · totals only, never names or EPIC numbers</a:t>
+              <a:t>Tamil Nadu SIR 2026 · ImpactMojo · totals only, never names or EPIC numbers</a:t>
             </a:r>
             <a:endParaRPr lang="en-US" sz="900" dirty="0"/>
           </a:p>
@@ -15860,7 +15860,7 @@
                 <a:ea typeface="Calibri" pitchFamily="34" charset="-122"/>
                 <a:cs typeface="Calibri" pitchFamily="34" charset="-120"/>
               </a:rPr>
-              <a:t>Tamil Nadu SIR 2026 · PinPoint Ventures · totals only, never names or EPIC numbers</a:t>
+              <a:t>Tamil Nadu SIR 2026 · ImpactMojo · totals only, never names or EPIC numbers</a:t>
             </a:r>
             <a:endParaRPr lang="en-US" sz="900" dirty="0"/>
           </a:p>
@@ -16977,7 +16977,7 @@
                 <a:ea typeface="Calibri" pitchFamily="34" charset="-122"/>
                 <a:cs typeface="Calibri" pitchFamily="34" charset="-120"/>
               </a:rPr>
-              <a:t>Tamil Nadu SIR 2026 · PinPoint Ventures · totals only, never names or EPIC numbers</a:t>
+              <a:t>Tamil Nadu SIR 2026 · ImpactMojo · totals only, never names or EPIC numbers</a:t>
             </a:r>
             <a:endParaRPr lang="en-US" sz="900" dirty="0"/>
           </a:p>
@@ -18078,7 +18078,7 @@
                 <a:ea typeface="Calibri" pitchFamily="34" charset="-122"/>
                 <a:cs typeface="Calibri" pitchFamily="34" charset="-120"/>
               </a:rPr>
-              <a:t>PinPoint Ventures</a:t>
+              <a:t>ImpactMojo</a:t>
             </a:r>
             <a:endParaRPr lang="en-US" sz="1700" dirty="0"/>
           </a:p>
@@ -20189,7 +20189,7 @@
                 <a:ea typeface="Calibri" pitchFamily="34" charset="-122"/>
                 <a:cs typeface="Calibri" pitchFamily="34" charset="-120"/>
               </a:rPr>
-              <a:t>Tamil Nadu SIR 2026 · PinPoint Ventures · totals only, never names or EPIC numbers</a:t>
+              <a:t>Tamil Nadu SIR 2026 · ImpactMojo · totals only, never names or EPIC numbers</a:t>
             </a:r>
             <a:endParaRPr lang="en-US" sz="900" dirty="0"/>
           </a:p>
@@ -21389,7 +21389,7 @@
                 <a:ea typeface="Calibri" pitchFamily="34" charset="-122"/>
                 <a:cs typeface="Calibri" pitchFamily="34" charset="-120"/>
               </a:rPr>
-              <a:t>Tamil Nadu SIR 2026 · PinPoint Ventures · totals only, never names or EPIC numbers</a:t>
+              <a:t>Tamil Nadu SIR 2026 · ImpactMojo · totals only, never names or EPIC numbers</a:t>
             </a:r>
             <a:endParaRPr lang="en-US" sz="900" dirty="0"/>
           </a:p>
@@ -23148,7 +23148,7 @@
                 <a:ea typeface="Calibri" pitchFamily="34" charset="-122"/>
                 <a:cs typeface="Calibri" pitchFamily="34" charset="-120"/>
               </a:rPr>
-              <a:t>Tamil Nadu SIR 2026 · PinPoint Ventures · totals only, never names or EPIC numbers</a:t>
+              <a:t>Tamil Nadu SIR 2026 · ImpactMojo · totals only, never names or EPIC numbers</a:t>
             </a:r>
             <a:endParaRPr lang="en-US" sz="900" dirty="0"/>
           </a:p>
@@ -24273,7 +24273,7 @@
                 <a:ea typeface="Calibri" pitchFamily="34" charset="-122"/>
                 <a:cs typeface="Calibri" pitchFamily="34" charset="-120"/>
               </a:rPr>
-              <a:t>Tamil Nadu SIR 2026 · PinPoint Ventures · totals only, never names or EPIC numbers</a:t>
+              <a:t>Tamil Nadu SIR 2026 · ImpactMojo · totals only, never names or EPIC numbers</a:t>
             </a:r>
             <a:endParaRPr lang="en-US" sz="900" dirty="0"/>
           </a:p>
@@ -25419,7 +25419,7 @@
                 <a:ea typeface="Calibri" pitchFamily="34" charset="-122"/>
                 <a:cs typeface="Calibri" pitchFamily="34" charset="-120"/>
               </a:rPr>
-              <a:t>Tamil Nadu SIR 2026 · PinPoint Ventures · totals only, never names or EPIC numbers</a:t>
+              <a:t>Tamil Nadu SIR 2026 · ImpactMojo · totals only, never names or EPIC numbers</a:t>
             </a:r>
             <a:endParaRPr lang="en-US" sz="900" dirty="0"/>
           </a:p>
@@ -26544,7 +26544,7 @@
                 <a:ea typeface="Calibri" pitchFamily="34" charset="-122"/>
                 <a:cs typeface="Calibri" pitchFamily="34" charset="-120"/>
               </a:rPr>
-              <a:t>Tamil Nadu SIR 2026 · PinPoint Ventures · totals only, never names or EPIC numbers</a:t>
+              <a:t>Tamil Nadu SIR 2026 · ImpactMojo · totals only, never names or EPIC numbers</a:t>
             </a:r>
             <a:endParaRPr lang="en-US" sz="900" dirty="0"/>
           </a:p>
@@ -27922,7 +27922,7 @@
                 <a:ea typeface="Calibri" pitchFamily="34" charset="-122"/>
                 <a:cs typeface="Calibri" pitchFamily="34" charset="-120"/>
               </a:rPr>
-              <a:t>Tamil Nadu SIR 2026 · PinPoint Ventures · totals only, never names or EPIC numbers</a:t>
+              <a:t>Tamil Nadu SIR 2026 · ImpactMojo · totals only, never names or EPIC numbers</a:t>
             </a:r>
             <a:endParaRPr lang="en-US" sz="900" dirty="0"/>
           </a:p>

--- a/reports/tamil-nadu-sir-2026-deck.pptx
+++ b/reports/tamil-nadu-sir-2026-deck.pptx
@@ -3499,7 +3499,7 @@
           <a:p>
             <a:r>
               <a:rPr lang="en-US" dirty="0"/>
-              <a:t>No list of removals can show intent. Over the margin means large enough to decide a seat, and says nothing about whether the removals did.</a:t>
+              <a:t>No list of names left off can show intent. Over the margin means large enough to decide a seat, and says nothing about whether the names left off did.</a:t>
             </a:r>
             <a:endParaRPr lang="en-US" dirty="0"/>
           </a:p>
@@ -3675,7 +3675,7 @@
           <a:p>
             <a:r>
               <a:rPr lang="en-US" dirty="0"/>
-              <a:t>Against own district is each seat's rate less its district's, averaged over the party's seats. A minus means fewer removals than the district as a whole.</a:t>
+              <a:t>Against own district is each seat's rate less its district's, averaged over the party's seats. A minus means fewer names left off than the district as a whole.</a:t>
             </a:r>
             <a:endParaRPr lang="en-US" dirty="0"/>
           </a:p>
@@ -4203,7 +4203,7 @@
           <a:p>
             <a:r>
               <a:rPr lang="en-US" dirty="0"/>
-              <a:t>Per 100 electors is the number removed for every 100 people on the roll before the revision, which lets places of different size be compared. The winning margin is the winner's votes less the runner-up's.</a:t>
+              <a:t>Per 100 electors is the number left off for every 100 people on the roll before the revision, which lets places of different size be compared. The winning margin is the winner's votes less the runner-up's.</a:t>
             </a:r>
             <a:endParaRPr lang="en-US" dirty="0"/>
           </a:p>
@@ -5217,7 +5217,7 @@
                 <a:ea typeface="Calibri" pitchFamily="34" charset="-122"/>
                 <a:cs typeface="Calibri" pitchFamily="34" charset="-120"/>
               </a:rPr>
-              <a:t>Where the names were removed, on what recorded reason, what the final roll put back, and how the removals compare with the 2026 result</a:t>
+              <a:t>Where the names were left off, on what recorded reason, what the final roll put back, and how the names left off compare with the 2026 result</a:t>
             </a:r>
             <a:endParaRPr lang="en-US" sz="1700" dirty="0"/>
           </a:p>
@@ -5633,7 +5633,7 @@
                 <a:ea typeface="Calibri" pitchFamily="34" charset="-122"/>
                 <a:cs typeface="Calibri" pitchFamily="34" charset="-120"/>
               </a:rPr>
-              <a:t>removed per 100 electors in Chennai</a:t>
+              <a:t>left off per 100 electors in Chennai</a:t>
             </a:r>
             <a:endParaRPr lang="en-US" sz="1250" dirty="0"/>
           </a:p>
@@ -7555,7 +7555,7 @@
                 <a:ea typeface="Calibri" pitchFamily="34" charset="-122"/>
                 <a:cs typeface="Calibri" pitchFamily="34" charset="-120"/>
               </a:rPr>
-              <a:t>In those seats the removals were large enough to decide the result.</a:t>
+              <a:t>In those seats the names left off were enough to decide the result.</a:t>
             </a:r>
             <a:endParaRPr lang="en-US" sz="1350" dirty="0"/>
           </a:p>
@@ -7597,7 +7597,7 @@
                 <a:ea typeface="Calibri" pitchFamily="34" charset="-122"/>
                 <a:cs typeface="Calibri" pitchFamily="34" charset="-120"/>
               </a:rPr>
-              <a:t>The removal rate and the margin as a share of votes rise together a little (rank correlation 0.32), so the seats that lost most were not the closest contests.</a:t>
+              <a:t>The rate left off and the margin as a share of votes rise together a little (rank correlation 0.32), so the seats that lost most were not the closest contests.</a:t>
             </a:r>
             <a:endParaRPr lang="en-US" sz="1350" dirty="0"/>
           </a:p>
@@ -7702,7 +7702,7 @@
                 <a:ea typeface="Cambria" pitchFamily="34" charset="-122"/>
                 <a:cs typeface="Cambria" pitchFamily="34" charset="-120"/>
               </a:rPr>
-              <a:t>Counting only the living removed at each seat's turnout, they outnumber the margin in 168 seats</a:t>
+              <a:t>Counting only the living left off at each seat's turnout, they outnumber the margin in 168 seats</a:t>
             </a:r>
             <a:endParaRPr lang="en-US" sz="2700" dirty="0"/>
           </a:p>
@@ -7741,7 +7741,7 @@
                 <a:ea typeface="Calibri" pitchFamily="34" charset="-122"/>
                 <a:cs typeface="Calibri" pitchFamily="34" charset="-120"/>
               </a:rPr>
-              <a:t>Three ways of setting the removals against the margin, from the widest to the narrowest</a:t>
+              <a:t>Three ways of setting the names left off against the margin, from the widest to the narrowest</a:t>
             </a:r>
             <a:endParaRPr lang="en-US" sz="1400" dirty="0"/>
           </a:p>
@@ -8975,7 +8975,7 @@
                 <a:ea typeface="Calibri" pitchFamily="34" charset="-122"/>
                 <a:cs typeface="Calibri" pitchFamily="34" charset="-120"/>
               </a:rPr>
-              <a:t>In the other 66 seats, the runner-up could not have won even if every living person removed had voted for the runner-up at the seat's turnout. Even the narrowest count assumes all of them would have, which nobody can know.</a:t>
+              <a:t>In the other 66 seats, the runner-up could not have won even if every living person left off had voted for the runner-up at the seat's turnout. Even the narrowest count assumes all of them would have, which nobody can know.</a:t>
             </a:r>
             <a:endParaRPr lang="en-US" sz="1600" dirty="0"/>
           </a:p>
@@ -9119,7 +9119,7 @@
                 <a:ea typeface="Calibri" pitchFamily="34" charset="-122"/>
                 <a:cs typeface="Calibri" pitchFamily="34" charset="-120"/>
               </a:rPr>
-              <a:t>Names removed per 100 electors in the seats each party won, and against the rate of each seat's own district</a:t>
+              <a:t>Names left off per 100 electors in the seats each party won, and against the rate of each seat's own district</a:t>
             </a:r>
             <a:endParaRPr lang="en-US" sz="1400" dirty="0"/>
           </a:p>
@@ -10186,7 +10186,7 @@
                           <a:ea typeface="Calibri" pitchFamily="34" charset="-122"/>
                           <a:cs typeface="Calibri" pitchFamily="34" charset="-120"/>
                         </a:rPr>
-                        <a:t>Removed per 100</a:t>
+                        <a:t>Left off per 100</a:t>
                       </a:r>
                       <a:endParaRPr lang="en-US" sz="1200" dirty="0">
                         <a:latin typeface="Calibri" charset="0"/>
@@ -15672,7 +15672,7 @@
                 <a:ea typeface="Calibri" pitchFamily="34" charset="-122"/>
                 <a:cs typeface="Calibri" pitchFamily="34" charset="-120"/>
               </a:rPr>
-              <a:t>Whether women, the old or the young were removed more often, because no split by sex or age has been published. Whether each removal was right, or how anyone removed would have voted.</a:t>
+              <a:t>Whether women, the old or the young were left off more often, because no split by sex or age has been published. Whether each name was rightly left off, or how anyone left off would have voted.</a:t>
             </a:r>
             <a:endParaRPr lang="en-US" sz="1500" dirty="0"/>
           </a:p>
@@ -15716,7 +15716,7 @@
                 <a:ea typeface="Calibri" pitchFamily="34" charset="-122"/>
                 <a:cs typeface="Calibri" pitchFamily="34" charset="-120"/>
               </a:rPr>
-              <a:t>A reason on the list is what the officer wrote down, and nobody checked it. No list of removals can show intent.</a:t>
+              <a:t>A reason on the list is what the officer wrote down, and nobody checked it. No list of names left off can show intent.</a:t>
             </a:r>
             <a:endParaRPr lang="en-US" sz="1600" dirty="0"/>
           </a:p>
@@ -15821,7 +15821,7 @@
                 <a:ea typeface="Cambria" pitchFamily="34" charset="-122"/>
                 <a:cs typeface="Cambria" pitchFamily="34" charset="-120"/>
               </a:rPr>
-              <a:t>Publish who was removed, and on what basis</a:t>
+              <a:t>Publish who was left off, and on what basis</a:t>
             </a:r>
             <a:endParaRPr lang="en-US" sz="2700" dirty="0"/>
           </a:p>
@@ -16745,7 +16745,7 @@
                 <a:ea typeface="Calibri" pitchFamily="34" charset="-122"/>
                 <a:cs typeface="Calibri" pitchFamily="34" charset="-120"/>
               </a:rPr>
-              <a:t>Publish the names removed by sex and age for every constituency, with the roll before the revision by sex.</a:t>
+              <a:t>Publish the names left off by sex and age for every constituency, with the roll before the revision by sex.</a:t>
             </a:r>
             <a:endParaRPr lang="en-US" sz="1700" dirty="0"/>
           </a:p>
@@ -17924,7 +17924,7 @@
                 <a:ea typeface="Calibri" pitchFamily="34" charset="-122"/>
                 <a:cs typeface="Calibri" pitchFamily="34" charset="-120"/>
               </a:rPr>
-              <a:t>Each seat's rate is also set against its own district's, because Chennai and the districts around it removed far more names than the rest of the state.</a:t>
+              <a:t>Each seat's rate is also set against its own district's, because Chennai and the districts around it lost far more names than the rest of the state.</a:t>
             </a:r>
             <a:endParaRPr lang="en-US" sz="1500" dirty="0"/>
           </a:p>
@@ -20111,7 +20111,7 @@
                 <a:ea typeface="Cambria" pitchFamily="34" charset="-122"/>
                 <a:cs typeface="Cambria" pitchFamily="34" charset="-120"/>
               </a:rPr>
-              <a:t>The revision removed 15.2 of every 100 electors, and more than the winning margin in 211 of 234 seats</a:t>
+              <a:t>The revision left 15.2 of every 100 electors off the draft, and more than the winning margin in 211 of 234 seats</a:t>
             </a:r>
             <a:endParaRPr lang="en-US" sz="2700" dirty="0"/>
           </a:p>
@@ -21096,7 +21096,7 @@
                 <a:ea typeface="Calibri" pitchFamily="34" charset="-122"/>
                 <a:cs typeface="Calibri" pitchFamily="34" charset="-120"/>
               </a:rPr>
-              <a:t>In 211 of the 234 constituencies, more names were left off than the 2026 winning margin, large enough to decide the seat. Counting only the removed not entered as dead, at each seat's turnout, the number is 168.</a:t>
+              <a:t>In 211 of the 234 constituencies, more names were left off than the 2026 winning margin, large enough to decide the seat. Counting only those left off and not entered as dead, at each seat's turnout, the number is 168.</a:t>
             </a:r>
             <a:endParaRPr lang="en-US" sz="1600" dirty="0"/>
           </a:p>
@@ -21140,7 +21140,7 @@
                 <a:ea typeface="Calibri" pitchFamily="34" charset="-122"/>
                 <a:cs typeface="Calibri" pitchFamily="34" charset="-120"/>
               </a:rPr>
-              <a:t>Chennai lost 35.6 of every 100 electors. It holds 6.2% of the roll and 14.6% of the names removed.</a:t>
+              <a:t>Chennai lost 35.6 of every 100 electors. It holds 6.2% of the roll and 14.6% of the names left off the draft.</a:t>
             </a:r>
             <a:endParaRPr lang="en-US" sz="1600" dirty="0"/>
           </a:p>
@@ -21162,7 +21162,7 @@
                 <a:ea typeface="Calibri" pitchFamily="34" charset="-122"/>
                 <a:cs typeface="Calibri" pitchFamily="34" charset="-120"/>
               </a:rPr>
-              <a:t>The final roll was 23.3 lakh larger than the draft, at most 23.9% of the names removed, and it includes new voters.</a:t>
+              <a:t>The final roll was 23.3 lakh larger than the draft, at most 23.9% of the names left off, and it includes new voters.</a:t>
             </a:r>
             <a:endParaRPr lang="en-US" sz="1600" dirty="0"/>
           </a:p>
@@ -21206,7 +21206,7 @@
                 <a:ea typeface="Calibri" pitchFamily="34" charset="-122"/>
                 <a:cs typeface="Calibri" pitchFamily="34" charset="-120"/>
               </a:rPr>
-              <a:t>No split of the removals by sex or age has been published. A reason on the list is what the officer wrote down, and nobody checked it.</a:t>
+              <a:t>No split of the names left off by sex or age has been published. A reason on the list is what the officer wrote down, and nobody checked it.</a:t>
             </a:r>
             <a:endParaRPr lang="en-US" sz="1200" dirty="0"/>
           </a:p>
@@ -24234,7 +24234,7 @@
                 <a:ea typeface="Calibri" pitchFamily="34" charset="-122"/>
                 <a:cs typeface="Calibri" pitchFamily="34" charset="-120"/>
               </a:rPr>
-              <a:t>Share of each district's removals by the reason entered, the twelve districts with the highest rates</a:t>
+              <a:t>Share of each district's names left off, by the reason entered, the twelve districts with the highest rates</a:t>
             </a:r>
             <a:endParaRPr lang="en-US" sz="1400" dirty="0"/>
           </a:p>
@@ -25173,7 +25173,7 @@
                 <a:ea typeface="Calibri" pitchFamily="34" charset="-122"/>
                 <a:cs typeface="Calibri" pitchFamily="34" charset="-120"/>
               </a:rPr>
-              <a:t>Where more names were removed, more were marked shifted or absent (rank correlation 0.74 across constituencies).</a:t>
+              <a:t>Where more names were left off, more were marked shifted or absent (rank correlation 0.74 across constituencies).</a:t>
             </a:r>
             <a:endParaRPr lang="en-US" sz="1300" dirty="0"/>
           </a:p>
@@ -25380,7 +25380,7 @@
                 <a:ea typeface="Calibri" pitchFamily="34" charset="-122"/>
                 <a:cs typeface="Calibri" pitchFamily="34" charset="-120"/>
               </a:rPr>
-              <a:t>Removed per 100 electors, by reason</a:t>
+              <a:t>Left off per 100 electors, by reason</a:t>
             </a:r>
             <a:endParaRPr lang="en-US" sz="1400" dirty="0"/>
           </a:p>
@@ -26340,7 +26340,7 @@
                 <a:ea typeface="Calibri" pitchFamily="34" charset="-122"/>
                 <a:cs typeface="Calibri" pitchFamily="34" charset="-120"/>
               </a:rPr>
-              <a:t>Chennai holds 6.2% of the roll and 14.6% of the names removed, 14,25,018 in all.</a:t>
+              <a:t>Chennai holds 6.2% of the roll and 14.6% of the names left off the draft, 14,25,018 in all.</a:t>
             </a:r>
             <a:endParaRPr lang="en-US" sz="1400" dirty="0"/>
           </a:p>
@@ -26466,7 +26466,7 @@
                 <a:ea typeface="Cambria" pitchFamily="34" charset="-122"/>
                 <a:cs typeface="Cambria" pitchFamily="34" charset="-120"/>
               </a:rPr>
-              <a:t>Women's share of the removals cannot be counted, because no split by sex has been published</a:t>
+              <a:t>Women's share of the names left off cannot be counted, because no split by sex has been published</a:t>
             </a:r>
             <a:endParaRPr lang="en-US" sz="2700" dirty="0"/>
           </a:p>
@@ -27844,7 +27844,7 @@
                 <a:ea typeface="Cambria" pitchFamily="34" charset="-122"/>
                 <a:cs typeface="Cambria" pitchFamily="34" charset="-120"/>
               </a:rPr>
-              <a:t>The final roll put back at most 23.9% of the names removed, and the roll is still 74.1 lakh smaller</a:t>
+              <a:t>The final roll put back at most 23.9% of the names left off, and the roll is still 74.1 lakh smaller</a:t>
             </a:r>
             <a:endParaRPr lang="en-US" sz="2700" dirty="0"/>
           </a:p>
@@ -27883,7 +27883,7 @@
                 <a:ea typeface="Calibri" pitchFamily="34" charset="-122"/>
                 <a:cs typeface="Calibri" pitchFamily="34" charset="-120"/>
               </a:rPr>
-              <a:t>Per 100 electors, removed at the draft and the fall that remains at the final roll, the twelve districts with the highest rates</a:t>
+              <a:t>Per 100 electors, left off at the draft and the fall that remains at the final roll, the twelve districts with the highest rates</a:t>
             </a:r>
             <a:endParaRPr lang="en-US" sz="1400" dirty="0"/>
           </a:p>
